--- a/deck.pptx
+++ b/deck.pptx
@@ -3266,8 +3266,8 @@
         </p:nvSpPr>
         <p:spPr>
           <a:xfrm>
-            <a:off x="2524061" y="1699128"/>
-            <a:ext cx="3381290" cy="4000399"/>
+            <a:off x="2115857" y="1526483"/>
+            <a:ext cx="3767723" cy="4457589"/>
           </a:xfrm>
           <a:prstGeom prst="rect">
             <a:avLst/>
@@ -3314,8 +3314,8 @@
         </p:nvSpPr>
         <p:spPr>
           <a:xfrm>
-            <a:off x="6286342" y="1699128"/>
-            <a:ext cx="3381290" cy="4000399"/>
+            <a:off x="6308113" y="1526483"/>
+            <a:ext cx="3767724" cy="4457589"/>
           </a:xfrm>
           <a:prstGeom prst="rect">
             <a:avLst/>
